--- a/presentation/output/evaluation_ds_ml_vehicules.pptx
+++ b/presentation/output/evaluation_ds_ml_vehicules.pptx
@@ -129,6 +129,11 @@
       </a:defRPr>
     </a:lvl9pPr>
   </p:defaultTextStyle>
+  <p:extLst>
+    <p:ext uri="{EFAFB233-063F-42B5-8137-9DF3F51BA10A}">
+      <p15:sldGuideLst xmlns:p15="http://schemas.microsoft.com/office/powerpoint/2012/main"/>
+    </p:ext>
+  </p:extLst>
 </p:presentation>
 </file>
 
@@ -5156,23 +5161,6 @@
         </c:scaling>
         <c:delete val="0"/>
         <c:axPos val="b"/>
-        <c:title>
-          <c:overlay val="1"/>
-          <c:txPr>
-            <a:bodyPr anchorCtr="1"/>
-            <a:lstStyle/>
-            <a:p>
-              <a:pPr>
-                <a:defRPr>
-                  <a:latin typeface="Arial"/>
-                  <a:ea typeface="Arial"/>
-                  <a:cs typeface="Arial"/>
-                </a:defRPr>
-              </a:pPr>
-              <a:endParaRPr lang="fr-FR"/>
-            </a:p>
-          </c:txPr>
-        </c:title>
         <c:numFmt formatCode="General" sourceLinked="1"/>
         <c:majorTickMark val="none"/>
         <c:minorTickMark val="none"/>
@@ -5773,23 +5761,6 @@
         </c:scaling>
         <c:delete val="0"/>
         <c:axPos val="b"/>
-        <c:title>
-          <c:overlay val="1"/>
-          <c:txPr>
-            <a:bodyPr anchorCtr="1"/>
-            <a:lstStyle/>
-            <a:p>
-              <a:pPr>
-                <a:defRPr>
-                  <a:latin typeface="Arial"/>
-                  <a:ea typeface="Arial"/>
-                  <a:cs typeface="Arial"/>
-                </a:defRPr>
-              </a:pPr>
-              <a:endParaRPr lang="fr-FR"/>
-            </a:p>
-          </c:txPr>
-        </c:title>
         <c:numFmt formatCode="General" sourceLinked="1"/>
         <c:majorTickMark val="none"/>
         <c:minorTickMark val="none"/>
@@ -6079,23 +6050,6 @@
         </c:scaling>
         <c:delete val="0"/>
         <c:axPos val="b"/>
-        <c:title>
-          <c:overlay val="1"/>
-          <c:txPr>
-            <a:bodyPr anchorCtr="1"/>
-            <a:lstStyle/>
-            <a:p>
-              <a:pPr>
-                <a:defRPr>
-                  <a:latin typeface="Arial"/>
-                  <a:ea typeface="Arial"/>
-                  <a:cs typeface="Arial"/>
-                </a:defRPr>
-              </a:pPr>
-              <a:endParaRPr lang="fr-FR"/>
-            </a:p>
-          </c:txPr>
-        </c:title>
         <c:numFmt formatCode="General" sourceLinked="1"/>
         <c:majorTickMark val="none"/>
         <c:minorTickMark val="none"/>
@@ -6248,11 +6202,6 @@
             <c:idx val="0"/>
             <c:invertIfNegative val="0"/>
             <c:bubble3D val="0"/>
-            <c:spPr>
-              <a:solidFill>
-                <a:srgbClr val="008C85"/>
-              </a:solidFill>
-            </c:spPr>
             <c:extLst>
               <c:ext xmlns:c16="http://schemas.microsoft.com/office/drawing/2014/chart" uri="{C3380CC4-5D6E-409C-BE32-E72D297353CC}">
                 <c16:uniqueId val="{00000001-8419-B54A-887E-FE79BE01A135}"/>
@@ -10789,23 +10738,6 @@
         </c:scaling>
         <c:delete val="0"/>
         <c:axPos val="b"/>
-        <c:title>
-          <c:overlay val="1"/>
-          <c:txPr>
-            <a:bodyPr anchorCtr="1"/>
-            <a:lstStyle/>
-            <a:p>
-              <a:pPr>
-                <a:defRPr>
-                  <a:latin typeface="Arial"/>
-                  <a:ea typeface="Arial"/>
-                  <a:cs typeface="Arial"/>
-                </a:defRPr>
-              </a:pPr>
-              <a:endParaRPr lang="fr-FR"/>
-            </a:p>
-          </c:txPr>
-        </c:title>
         <c:numFmt formatCode="General" sourceLinked="1"/>
         <c:majorTickMark val="none"/>
         <c:minorTickMark val="none"/>
@@ -15340,23 +15272,6 @@
         </c:scaling>
         <c:delete val="0"/>
         <c:axPos val="b"/>
-        <c:title>
-          <c:overlay val="1"/>
-          <c:txPr>
-            <a:bodyPr anchorCtr="1"/>
-            <a:lstStyle/>
-            <a:p>
-              <a:pPr>
-                <a:defRPr>
-                  <a:latin typeface="Arial"/>
-                  <a:ea typeface="Arial"/>
-                  <a:cs typeface="Arial"/>
-                </a:defRPr>
-              </a:pPr>
-              <a:endParaRPr lang="fr-FR"/>
-            </a:p>
-          </c:txPr>
-        </c:title>
         <c:numFmt formatCode="General" sourceLinked="1"/>
         <c:majorTickMark val="none"/>
         <c:minorTickMark val="none"/>
@@ -15605,23 +15520,6 @@
         </c:scaling>
         <c:delete val="0"/>
         <c:axPos val="b"/>
-        <c:title>
-          <c:overlay val="1"/>
-          <c:txPr>
-            <a:bodyPr anchorCtr="1"/>
-            <a:lstStyle/>
-            <a:p>
-              <a:pPr>
-                <a:defRPr>
-                  <a:latin typeface="Arial"/>
-                  <a:ea typeface="Arial"/>
-                  <a:cs typeface="Arial"/>
-                </a:defRPr>
-              </a:pPr>
-              <a:endParaRPr lang="fr-FR"/>
-            </a:p>
-          </c:txPr>
-        </c:title>
         <c:numFmt formatCode="General" sourceLinked="1"/>
         <c:majorTickMark val="none"/>
         <c:minorTickMark val="none"/>
@@ -20666,23 +20564,108 @@
           <a:lstStyle/>
           <a:p>
             <a:r>
-              <a:t>Durée : 80 secondes.</a:t>
+              <a:rPr dirty="0"/>
+              <a:t>Durée : 80 </a:t>
+            </a:r>
+            <a:r>
+              <a:rPr dirty="0" err="1"/>
+              <a:t>secondes</a:t>
+            </a:r>
+            <a:r>
+              <a:rPr dirty="0"/>
+              <a:t>.</a:t>
             </a:r>
           </a:p>
           <a:p>
-            <a:endParaRPr/>
+            <a:endParaRPr dirty="0"/>
           </a:p>
           <a:p>
             <a:r>
-              <a:t>Nous retenons trois dimensions complémentaires : capacité du moteur, gabarit et émission déclarée. La consommation est très liée au CO2, corrélation proche de 0,976. Inclure les deux donnerait davantage de poids à une information redondante dans la distance. Les identifiants sont exclus. Les catégories énergie et hybride servent à décrire les groupes après leur construction, sans imposer une distance arbitraire entre codes. Les variables retenues restent corrélées : puissance et CO2 environ 0,647, masse et CO2 0,625. Standardiser ne supprime pas cette corrélation. Il s'agit d'un choix d'analyse qui doit être mis à l'épreuve, par exemple en retirant le CO2.</a:t>
+              <a:rPr lang="fr-FR" dirty="0"/>
+              <a:t>Ces trois variables répondent donc à trois questions : </a:t>
+            </a:r>
+            <a:r>
+              <a:rPr lang="fr-FR" b="1" dirty="0"/>
+              <a:t>quelle puissance ? quelle masse ? quelles émissions ?</a:t>
             </a:r>
           </a:p>
           <a:p>
-            <a:endParaRPr/>
+            <a:endParaRPr lang="fr-FR" b="1" dirty="0"/>
           </a:p>
           <a:p>
             <a:r>
-              <a:t>Sources : travail_v2/resultats/correlations.csv et clustering_resume.json.</a:t>
+              <a:rPr lang="fr-FR" b="1" dirty="0"/>
+              <a:t>Pourquoi ne pas avoir mis la consommation : </a:t>
+            </a:r>
+          </a:p>
+          <a:p>
+            <a:pPr marL="0" marR="0" lvl="0" indent="0" algn="l" defTabSz="914400" rtl="0" eaLnBrk="1" fontAlgn="auto" latinLnBrk="0" hangingPunct="1">
+              <a:lnSpc>
+                <a:spcPct val="100000"/>
+              </a:lnSpc>
+              <a:spcBef>
+                <a:spcPts val="0"/>
+              </a:spcBef>
+              <a:spcAft>
+                <a:spcPts val="0"/>
+              </a:spcAft>
+              <a:buClrTx/>
+              <a:buSzTx/>
+              <a:buFontTx/>
+              <a:buNone/>
+              <a:tabLst/>
+              <a:defRPr/>
+            </a:pPr>
+            <a:r>
+              <a:rPr lang="fr-FR" dirty="0"/>
+              <a:t>Parce qu’elle est très fortement liée au CO₂ dans ce fichier : leur corrélation est d’environ </a:t>
+            </a:r>
+            <a:r>
+              <a:rPr lang="fr-FR" b="1" dirty="0"/>
+              <a:t>0,976</a:t>
+            </a:r>
+            <a:r>
+              <a:rPr lang="fr-FR" dirty="0"/>
+              <a:t>. Les utiliser ensemble donnerait davantage de poids à une information très proche dans le calcul des distances.</a:t>
+            </a:r>
+          </a:p>
+          <a:p>
+            <a:endParaRPr lang="fr-FR" b="1" dirty="0"/>
+          </a:p>
+          <a:p>
+            <a:endParaRPr lang="fr-FR" b="1" dirty="0"/>
+          </a:p>
+          <a:p>
+            <a:endParaRPr dirty="0"/>
+          </a:p>
+          <a:p>
+            <a:r>
+              <a:rPr dirty="0"/>
+              <a:t>Sources : travail_v2/</a:t>
+            </a:r>
+            <a:r>
+              <a:rPr dirty="0" err="1"/>
+              <a:t>resultats</a:t>
+            </a:r>
+            <a:r>
+              <a:rPr dirty="0"/>
+              <a:t>/</a:t>
+            </a:r>
+            <a:r>
+              <a:rPr dirty="0" err="1"/>
+              <a:t>correlations.csv</a:t>
+            </a:r>
+            <a:r>
+              <a:rPr dirty="0"/>
+              <a:t> et </a:t>
+            </a:r>
+            <a:r>
+              <a:rPr dirty="0" err="1"/>
+              <a:t>clustering_resume.json</a:t>
+            </a:r>
+            <a:r>
+              <a:rPr dirty="0"/>
+              <a:t>.</a:t>
             </a:r>
           </a:p>
         </p:txBody>
@@ -20759,23 +20742,269 @@
           <a:lstStyle/>
           <a:p>
             <a:r>
-              <a:t>Durée : 80 secondes.</a:t>
-            </a:r>
+              <a:rPr dirty="0"/>
+              <a:t>Durée : 80 </a:t>
+            </a:r>
+            <a:r>
+              <a:rPr dirty="0" err="1"/>
+              <a:t>secondes</a:t>
+            </a:r>
+            <a:r>
+              <a:rPr dirty="0"/>
+              <a:t>.</a:t>
+            </a:r>
+            <a:endParaRPr lang="fr-FR" dirty="0"/>
           </a:p>
           <a:p>
-            <a:endParaRPr/>
+            <a:endParaRPr lang="fr-FR" dirty="0"/>
           </a:p>
           <a:p>
             <a:r>
-              <a:t>K-Means utilise la distance euclidienne. Sans transformation, un écart de masse de quelques centaines de kg pèserait bien davantage qu'un écart de CO2 de quelques dizaines de g/km. Chaque variable est centrée puis divisée par son écart-type : z=(x-moyenne)/écart-type. Les écarts-types initiaux sont 80,1 kW, 371,7 kg et 44,2 g/km. Après transformation ils valent tous 1, avec une moyenne nulle. Ce traitement équilibre les unités, mais conserve les corrélations et la sensibilité aux valeurs extrêmes. Ici le clustering décrit le catalogue complet : le scaler est ajusté sur ce catalogue.</a:t>
-            </a:r>
+              <a:rPr lang="fr-FR" dirty="0"/>
+              <a:t>rendre les trois variables comparables avant K-</a:t>
+            </a:r>
+            <a:r>
+              <a:rPr lang="fr-FR" dirty="0" err="1"/>
+              <a:t>means</a:t>
+            </a:r>
+            <a:endParaRPr lang="fr-FR" dirty="0"/>
           </a:p>
           <a:p>
-            <a:endParaRPr/>
+            <a:endParaRPr lang="fr-FR" dirty="0"/>
           </a:p>
           <a:p>
             <a:r>
-              <a:t>Source : travail_v2/resultats/clustering_standardisation.csv.</a:t>
+              <a:rPr lang="fr-FR" b="1" dirty="0"/>
+              <a:t>371,7 kg n’est pas la masse moyenne des véhicules</a:t>
+            </a:r>
+            <a:r>
+              <a:rPr lang="fr-FR" dirty="0"/>
+              <a:t>. C’est une mesure de la variation des masse</a:t>
+            </a:r>
+          </a:p>
+          <a:p>
+            <a:endParaRPr lang="fr-FR" dirty="0"/>
+          </a:p>
+          <a:p>
+            <a:r>
+              <a:rPr lang="fr-FR" sz="1200" kern="1200" dirty="0"/>
+              <a:t>(valeur − moyenne) / écart-type</a:t>
+            </a:r>
+          </a:p>
+          <a:p>
+            <a:pPr lvl="0"/>
+            <a:r>
+              <a:rPr lang="fr-FR" b="1" dirty="0"/>
+              <a:t>Centrer</a:t>
+            </a:r>
+            <a:r>
+              <a:rPr lang="fr-FR" dirty="0"/>
+              <a:t> : soustraire la moyenne. La moyenne devient </a:t>
+            </a:r>
+            <a:r>
+              <a:rPr lang="fr-FR" b="1" dirty="0"/>
+              <a:t>0</a:t>
+            </a:r>
+            <a:r>
+              <a:rPr lang="fr-FR" dirty="0"/>
+              <a:t>.</a:t>
+            </a:r>
+          </a:p>
+          <a:p>
+            <a:pPr lvl="0"/>
+            <a:r>
+              <a:rPr lang="fr-FR" b="1" dirty="0"/>
+              <a:t>Réduire</a:t>
+            </a:r>
+            <a:r>
+              <a:rPr lang="fr-FR" dirty="0"/>
+              <a:t> : diviser par l’écart-type. L’écart-type devient </a:t>
+            </a:r>
+            <a:r>
+              <a:rPr lang="fr-FR" b="1" dirty="0"/>
+              <a:t>1</a:t>
+            </a:r>
+            <a:r>
+              <a:rPr lang="fr-FR" dirty="0"/>
+              <a:t>.</a:t>
+            </a:r>
+          </a:p>
+          <a:p>
+            <a:endParaRPr dirty="0"/>
+          </a:p>
+          <a:p>
+            <a:r>
+              <a:rPr dirty="0"/>
+              <a:t>Après transformation </a:t>
+            </a:r>
+            <a:r>
+              <a:rPr dirty="0" err="1"/>
+              <a:t>ils</a:t>
+            </a:r>
+            <a:r>
+              <a:rPr dirty="0"/>
+              <a:t> valent </a:t>
+            </a:r>
+            <a:r>
+              <a:rPr dirty="0" err="1"/>
+              <a:t>tous</a:t>
+            </a:r>
+            <a:r>
+              <a:rPr dirty="0"/>
+              <a:t> 1, avec </a:t>
+            </a:r>
+            <a:r>
+              <a:rPr dirty="0" err="1"/>
+              <a:t>une</a:t>
+            </a:r>
+            <a:r>
+              <a:rPr dirty="0"/>
+              <a:t> </a:t>
+            </a:r>
+            <a:r>
+              <a:rPr dirty="0" err="1"/>
+              <a:t>moyenne</a:t>
+            </a:r>
+            <a:r>
+              <a:rPr dirty="0"/>
+              <a:t> </a:t>
+            </a:r>
+            <a:r>
+              <a:rPr dirty="0" err="1"/>
+              <a:t>nulle</a:t>
+            </a:r>
+            <a:r>
+              <a:rPr dirty="0"/>
+              <a:t>. Ce </a:t>
+            </a:r>
+            <a:r>
+              <a:rPr dirty="0" err="1"/>
+              <a:t>traitement</a:t>
+            </a:r>
+            <a:r>
+              <a:rPr dirty="0"/>
+              <a:t> </a:t>
+            </a:r>
+            <a:r>
+              <a:rPr dirty="0" err="1"/>
+              <a:t>équilibre</a:t>
+            </a:r>
+            <a:r>
+              <a:rPr dirty="0"/>
+              <a:t> les </a:t>
+            </a:r>
+            <a:r>
+              <a:rPr dirty="0" err="1"/>
+              <a:t>unités</a:t>
+            </a:r>
+            <a:r>
+              <a:rPr dirty="0"/>
+              <a:t>, </a:t>
+            </a:r>
+            <a:r>
+              <a:rPr dirty="0" err="1"/>
+              <a:t>mais</a:t>
+            </a:r>
+            <a:r>
+              <a:rPr dirty="0"/>
+              <a:t> conserve les </a:t>
+            </a:r>
+            <a:r>
+              <a:rPr dirty="0" err="1"/>
+              <a:t>corrélations</a:t>
+            </a:r>
+            <a:r>
+              <a:rPr dirty="0"/>
+              <a:t> et la </a:t>
+            </a:r>
+            <a:r>
+              <a:rPr dirty="0" err="1"/>
+              <a:t>sensibilité</a:t>
+            </a:r>
+            <a:r>
+              <a:rPr dirty="0"/>
+              <a:t> aux </a:t>
+            </a:r>
+            <a:r>
+              <a:rPr dirty="0" err="1"/>
+              <a:t>valeurs</a:t>
+            </a:r>
+            <a:r>
+              <a:rPr dirty="0"/>
+              <a:t> </a:t>
+            </a:r>
+            <a:r>
+              <a:rPr dirty="0" err="1"/>
+              <a:t>extrêmes</a:t>
+            </a:r>
+            <a:r>
+              <a:rPr dirty="0"/>
+              <a:t>. </a:t>
+            </a:r>
+            <a:r>
+              <a:rPr dirty="0" err="1"/>
+              <a:t>Ici</a:t>
+            </a:r>
+            <a:r>
+              <a:rPr dirty="0"/>
+              <a:t> le clustering </a:t>
+            </a:r>
+            <a:r>
+              <a:rPr dirty="0" err="1"/>
+              <a:t>décrit</a:t>
+            </a:r>
+            <a:r>
+              <a:rPr dirty="0"/>
+              <a:t> le catalogue </a:t>
+            </a:r>
+            <a:r>
+              <a:rPr dirty="0" err="1"/>
+              <a:t>complet</a:t>
+            </a:r>
+            <a:r>
+              <a:rPr dirty="0"/>
+              <a:t> : le scaler est </a:t>
+            </a:r>
+            <a:r>
+              <a:rPr dirty="0" err="1"/>
+              <a:t>ajusté</a:t>
+            </a:r>
+            <a:r>
+              <a:rPr dirty="0"/>
+              <a:t> sur </a:t>
+            </a:r>
+            <a:r>
+              <a:rPr dirty="0" err="1"/>
+              <a:t>ce</a:t>
+            </a:r>
+            <a:r>
+              <a:rPr dirty="0"/>
+              <a:t> catalogue.</a:t>
+            </a:r>
+          </a:p>
+          <a:p>
+            <a:endParaRPr dirty="0"/>
+          </a:p>
+          <a:p>
+            <a:r>
+              <a:rPr dirty="0"/>
+              <a:t>Source : travail_v2/</a:t>
+            </a:r>
+            <a:r>
+              <a:rPr dirty="0" err="1"/>
+              <a:t>resultats</a:t>
+            </a:r>
+            <a:r>
+              <a:rPr dirty="0"/>
+              <a:t>/</a:t>
+            </a:r>
+            <a:r>
+              <a:rPr dirty="0" err="1"/>
+              <a:t>clustering_standardisation.csv</a:t>
+            </a:r>
+            <a:r>
+              <a:rPr dirty="0"/>
+              <a:t>.</a:t>
             </a:r>
           </a:p>
         </p:txBody>
@@ -21596,23 +21825,445 @@
           <a:lstStyle/>
           <a:p>
             <a:r>
-              <a:t>Durée : 75 secondes.</a:t>
+              <a:rPr dirty="0"/>
+              <a:t>Durée : 75 </a:t>
+            </a:r>
+            <a:r>
+              <a:rPr dirty="0" err="1"/>
+              <a:t>secondes</a:t>
+            </a:r>
+            <a:r>
+              <a:rPr dirty="0"/>
+              <a:t>.</a:t>
             </a:r>
           </a:p>
           <a:p>
-            <a:endParaRPr/>
+            <a:endParaRPr dirty="0"/>
           </a:p>
           <a:p>
             <a:r>
-              <a:t>Une ligne représente une variante de véhicule, pas une vente et pas un véhicule en circulation. Le fichier brut contient 20 880 lignes et 26 colonnes. Le nettoyage ne retire ici ni doublon exact ni anomalie physique selon les règles retenues. Le jeu d'analyse garde 20 824 lignes complètes et 12 variables. Les 56 lignes exclues concernent EL, faute de consommation et CO2 renseignés : leur absence ne signifie pas CO2 nul. Les 444 familles réunissent marque et modèle. Le nettoyage normalise les textes, contrôle les absences, valeurs négatives et masses inversées. Les valeurs extrêmes plausibles restent dans l'étude.</a:t>
-            </a:r>
+              <a:rPr dirty="0"/>
+              <a:t>Une </a:t>
+            </a:r>
+            <a:r>
+              <a:rPr dirty="0" err="1"/>
+              <a:t>ligne</a:t>
+            </a:r>
+            <a:r>
+              <a:rPr dirty="0"/>
+              <a:t> </a:t>
+            </a:r>
+            <a:r>
+              <a:rPr dirty="0" err="1"/>
+              <a:t>représente</a:t>
+            </a:r>
+            <a:r>
+              <a:rPr dirty="0"/>
+              <a:t> </a:t>
+            </a:r>
+            <a:r>
+              <a:rPr dirty="0" err="1"/>
+              <a:t>une</a:t>
+            </a:r>
+            <a:r>
+              <a:rPr dirty="0"/>
+              <a:t> </a:t>
+            </a:r>
+            <a:r>
+              <a:rPr dirty="0" err="1"/>
+              <a:t>variante</a:t>
+            </a:r>
+            <a:r>
+              <a:rPr dirty="0"/>
+              <a:t> de véhicule, pas </a:t>
+            </a:r>
+            <a:r>
+              <a:rPr dirty="0" err="1"/>
+              <a:t>une</a:t>
+            </a:r>
+            <a:r>
+              <a:rPr dirty="0"/>
+              <a:t> vente et pas un véhicule </a:t>
+            </a:r>
+            <a:r>
+              <a:rPr dirty="0" err="1"/>
+              <a:t>en</a:t>
+            </a:r>
+            <a:r>
+              <a:rPr dirty="0"/>
+              <a:t> circulation. Le </a:t>
+            </a:r>
+            <a:r>
+              <a:rPr dirty="0" err="1"/>
+              <a:t>fichier</a:t>
+            </a:r>
+            <a:r>
+              <a:rPr dirty="0"/>
+              <a:t> brut </a:t>
+            </a:r>
+            <a:r>
+              <a:rPr dirty="0" err="1"/>
+              <a:t>contient</a:t>
+            </a:r>
+            <a:r>
+              <a:rPr dirty="0"/>
+              <a:t> 20 880 </a:t>
+            </a:r>
+            <a:r>
+              <a:rPr dirty="0" err="1"/>
+              <a:t>lignes</a:t>
+            </a:r>
+            <a:r>
+              <a:rPr dirty="0"/>
+              <a:t> et 26 </a:t>
+            </a:r>
+            <a:r>
+              <a:rPr dirty="0" err="1"/>
+              <a:t>colonnes</a:t>
+            </a:r>
+            <a:r>
+              <a:rPr dirty="0"/>
+              <a:t>. Le </a:t>
+            </a:r>
+            <a:r>
+              <a:rPr dirty="0" err="1"/>
+              <a:t>nettoyage</a:t>
+            </a:r>
+            <a:r>
+              <a:rPr dirty="0"/>
+              <a:t> ne retire </a:t>
+            </a:r>
+            <a:r>
+              <a:rPr dirty="0" err="1"/>
+              <a:t>ici</a:t>
+            </a:r>
+            <a:r>
+              <a:rPr dirty="0"/>
+              <a:t> </a:t>
+            </a:r>
+            <a:r>
+              <a:rPr dirty="0" err="1"/>
+              <a:t>ni</a:t>
+            </a:r>
+            <a:r>
+              <a:rPr dirty="0"/>
+              <a:t> </a:t>
+            </a:r>
+            <a:r>
+              <a:rPr dirty="0" err="1"/>
+              <a:t>doublon</a:t>
+            </a:r>
+            <a:r>
+              <a:rPr dirty="0"/>
+              <a:t> exact </a:t>
+            </a:r>
+            <a:r>
+              <a:rPr dirty="0" err="1"/>
+              <a:t>ni</a:t>
+            </a:r>
+            <a:r>
+              <a:rPr dirty="0"/>
+              <a:t> </a:t>
+            </a:r>
+            <a:r>
+              <a:rPr dirty="0" err="1"/>
+              <a:t>anomalie</a:t>
+            </a:r>
+            <a:r>
+              <a:rPr dirty="0"/>
+              <a:t> physique </a:t>
+            </a:r>
+            <a:r>
+              <a:rPr dirty="0" err="1"/>
+              <a:t>selon</a:t>
+            </a:r>
+            <a:r>
+              <a:rPr dirty="0"/>
+              <a:t> les </a:t>
+            </a:r>
+            <a:r>
+              <a:rPr dirty="0" err="1"/>
+              <a:t>règles</a:t>
+            </a:r>
+            <a:r>
+              <a:rPr dirty="0"/>
+              <a:t> </a:t>
+            </a:r>
+            <a:r>
+              <a:rPr dirty="0" err="1"/>
+              <a:t>retenues</a:t>
+            </a:r>
+            <a:r>
+              <a:rPr dirty="0"/>
+              <a:t>. Le jeu </a:t>
+            </a:r>
+            <a:r>
+              <a:rPr dirty="0" err="1"/>
+              <a:t>d'analyse</a:t>
+            </a:r>
+            <a:r>
+              <a:rPr dirty="0"/>
+              <a:t> garde 20 824 </a:t>
+            </a:r>
+            <a:r>
+              <a:rPr dirty="0" err="1"/>
+              <a:t>lignes</a:t>
+            </a:r>
+            <a:r>
+              <a:rPr dirty="0"/>
+              <a:t> </a:t>
+            </a:r>
+            <a:r>
+              <a:rPr dirty="0" err="1"/>
+              <a:t>complètes</a:t>
+            </a:r>
+            <a:r>
+              <a:rPr dirty="0"/>
+              <a:t> et 12 variables. Les 56 </a:t>
+            </a:r>
+            <a:r>
+              <a:rPr dirty="0" err="1"/>
+              <a:t>lignes</a:t>
+            </a:r>
+            <a:r>
+              <a:rPr dirty="0"/>
+              <a:t> </a:t>
+            </a:r>
+            <a:r>
+              <a:rPr dirty="0" err="1"/>
+              <a:t>exclues</a:t>
+            </a:r>
+            <a:r>
+              <a:rPr dirty="0"/>
+              <a:t> </a:t>
+            </a:r>
+            <a:r>
+              <a:rPr dirty="0" err="1"/>
+              <a:t>concernent</a:t>
+            </a:r>
+            <a:r>
+              <a:rPr dirty="0"/>
+              <a:t> EL, faute de </a:t>
+            </a:r>
+            <a:r>
+              <a:rPr dirty="0" err="1"/>
+              <a:t>consommation</a:t>
+            </a:r>
+            <a:r>
+              <a:rPr dirty="0"/>
+              <a:t> et CO2 </a:t>
+            </a:r>
+            <a:r>
+              <a:rPr dirty="0" err="1"/>
+              <a:t>renseignés</a:t>
+            </a:r>
+            <a:r>
+              <a:rPr dirty="0"/>
+              <a:t> : </a:t>
+            </a:r>
+            <a:r>
+              <a:rPr dirty="0" err="1"/>
+              <a:t>leur</a:t>
+            </a:r>
+            <a:r>
+              <a:rPr dirty="0"/>
+              <a:t> absence ne </a:t>
+            </a:r>
+            <a:r>
+              <a:rPr dirty="0" err="1"/>
+              <a:t>signifie</a:t>
+            </a:r>
+            <a:r>
+              <a:rPr dirty="0"/>
+              <a:t> pas CO2 </a:t>
+            </a:r>
+            <a:r>
+              <a:rPr dirty="0" err="1"/>
+              <a:t>nul</a:t>
+            </a:r>
+            <a:r>
+              <a:rPr dirty="0"/>
+              <a:t>. Les 444 </a:t>
+            </a:r>
+            <a:r>
+              <a:rPr dirty="0" err="1"/>
+              <a:t>familles</a:t>
+            </a:r>
+            <a:r>
+              <a:rPr dirty="0"/>
+              <a:t> </a:t>
+            </a:r>
+            <a:r>
+              <a:rPr dirty="0" err="1"/>
+              <a:t>réunissent</a:t>
+            </a:r>
+            <a:r>
+              <a:rPr dirty="0"/>
+              <a:t> marque et </a:t>
+            </a:r>
+            <a:r>
+              <a:rPr dirty="0" err="1"/>
+              <a:t>modèle</a:t>
+            </a:r>
+            <a:r>
+              <a:rPr dirty="0"/>
+              <a:t>. Le </a:t>
+            </a:r>
+            <a:r>
+              <a:rPr dirty="0" err="1"/>
+              <a:t>nettoyage</a:t>
+            </a:r>
+            <a:r>
+              <a:rPr dirty="0"/>
+              <a:t> </a:t>
+            </a:r>
+            <a:r>
+              <a:rPr dirty="0" err="1"/>
+              <a:t>normalise</a:t>
+            </a:r>
+            <a:r>
+              <a:rPr dirty="0"/>
+              <a:t> les </a:t>
+            </a:r>
+            <a:r>
+              <a:rPr dirty="0" err="1"/>
+              <a:t>textes</a:t>
+            </a:r>
+            <a:r>
+              <a:rPr dirty="0"/>
+              <a:t>, </a:t>
+            </a:r>
+            <a:r>
+              <a:rPr dirty="0" err="1"/>
+              <a:t>contrôle</a:t>
+            </a:r>
+            <a:r>
+              <a:rPr dirty="0"/>
+              <a:t> les absences, </a:t>
+            </a:r>
+            <a:r>
+              <a:rPr dirty="0" err="1"/>
+              <a:t>valeurs</a:t>
+            </a:r>
+            <a:r>
+              <a:rPr dirty="0"/>
+              <a:t> </a:t>
+            </a:r>
+            <a:r>
+              <a:rPr dirty="0" err="1"/>
+              <a:t>négatives</a:t>
+            </a:r>
+            <a:r>
+              <a:rPr dirty="0"/>
+              <a:t> et masses </a:t>
+            </a:r>
+            <a:r>
+              <a:rPr dirty="0" err="1"/>
+              <a:t>inversées</a:t>
+            </a:r>
+            <a:r>
+              <a:rPr dirty="0"/>
+              <a:t>. Les </a:t>
+            </a:r>
+            <a:r>
+              <a:rPr dirty="0" err="1"/>
+              <a:t>valeurs</a:t>
+            </a:r>
+            <a:r>
+              <a:rPr dirty="0"/>
+              <a:t> </a:t>
+            </a:r>
+            <a:r>
+              <a:rPr dirty="0" err="1"/>
+              <a:t>extrêmes</a:t>
+            </a:r>
+            <a:r>
+              <a:rPr dirty="0"/>
+              <a:t> </a:t>
+            </a:r>
+            <a:r>
+              <a:rPr dirty="0" err="1"/>
+              <a:t>plausibles</a:t>
+            </a:r>
+            <a:r>
+              <a:rPr dirty="0"/>
+              <a:t> </a:t>
+            </a:r>
+            <a:r>
+              <a:rPr dirty="0" err="1"/>
+              <a:t>restent</a:t>
+            </a:r>
+            <a:r>
+              <a:rPr dirty="0"/>
+              <a:t> dans </a:t>
+            </a:r>
+            <a:r>
+              <a:rPr dirty="0" err="1"/>
+              <a:t>l'étude</a:t>
+            </a:r>
+            <a:r>
+              <a:rPr dirty="0"/>
+              <a:t>.</a:t>
+            </a:r>
+            <a:endParaRPr lang="fr-FR" dirty="0"/>
           </a:p>
           <a:p>
-            <a:endParaRPr/>
+            <a:endParaRPr lang="fr-FR" dirty="0"/>
           </a:p>
           <a:p>
             <a:r>
-              <a:t>Sources : notebook nettoyage, donnees_nettoyees/bilan_qualite.csv, donnees_nettoyees/vehicules_analyse_conso_co2.csv.</a:t>
+              <a:rPr lang="fr-FR" dirty="0"/>
+              <a:t>EL = </a:t>
+            </a:r>
+            <a:r>
+              <a:rPr lang="fr-FR" dirty="0" err="1"/>
+              <a:t>éléctrique</a:t>
+            </a:r>
+            <a:r>
+              <a:rPr lang="fr-FR" dirty="0"/>
+              <a:t> </a:t>
+            </a:r>
+            <a:endParaRPr dirty="0"/>
+          </a:p>
+          <a:p>
+            <a:endParaRPr dirty="0"/>
+          </a:p>
+          <a:p>
+            <a:r>
+              <a:rPr dirty="0"/>
+              <a:t>Sources : notebook </a:t>
+            </a:r>
+            <a:r>
+              <a:rPr dirty="0" err="1"/>
+              <a:t>nettoyage</a:t>
+            </a:r>
+            <a:r>
+              <a:rPr dirty="0"/>
+              <a:t>, </a:t>
+            </a:r>
+            <a:r>
+              <a:rPr dirty="0" err="1"/>
+              <a:t>donnees_nettoyees</a:t>
+            </a:r>
+            <a:r>
+              <a:rPr dirty="0"/>
+              <a:t>/</a:t>
+            </a:r>
+            <a:r>
+              <a:rPr dirty="0" err="1"/>
+              <a:t>bilan_qualite.csv</a:t>
+            </a:r>
+            <a:r>
+              <a:rPr dirty="0"/>
+              <a:t>, </a:t>
+            </a:r>
+            <a:r>
+              <a:rPr dirty="0" err="1"/>
+              <a:t>donnees_nettoyees</a:t>
+            </a:r>
+            <a:r>
+              <a:rPr dirty="0"/>
+              <a:t>/vehicules_analyse_conso_co2.csv.</a:t>
             </a:r>
           </a:p>
         </p:txBody>
@@ -22467,38 +23118,284 @@
           <a:lstStyle/>
           <a:p>
             <a:r>
-              <a:t>Durée : 100 secondes.</a:t>
-            </a:r>
+              <a:rPr lang="fr-FR" dirty="0"/>
+              <a:t>qu’a-t-on appris, et jusqu’où peut-on utiliser ces résultats ? </a:t>
+            </a:r>
+            <a:endParaRPr dirty="0"/>
           </a:p>
           <a:p>
-            <a:endParaRPr/>
+            <a:endParaRPr lang="fr-FR" dirty="0"/>
           </a:p>
           <a:p>
             <a:r>
-              <a:t>Nous retenons trois enseignements reliés. Le modèle supervisé améliore nettement la baseline sur ce test familial, mais l'écart entre entraînement, validation et test limite la généralisation. La segmentation K=3 est interprétable en termes techniques et très stable face aux initialisations. Cependant son accord tombe à ARI 0,548 lorsqu'on plafonne les familles : la représentation du catalogue compte davantage que le seul hasard de l'algorithme. La valeur actuelle est donc exploratoire : comparer des profils et décider quelles données rechercher ensuite. Pour une décision environnementale ou professionnelle, il faut des données adaptées à l'usage, une population récente et une validation indépendante. Répondre explicitement à la question initiale : nous pouvons décrire des profils du catalogue et produire une estimation pédagogique du CO2, avec des limites documentées.</a:t>
-            </a:r>
+              <a:rPr lang="fr-FR" b="1" dirty="0"/>
+              <a:t>« 16,8 g/km » : le modèle prédit avec une précision limitée</a:t>
+            </a:r>
+            <a:endParaRPr lang="fr-FR" dirty="0"/>
           </a:p>
           <a:p>
-            <a:endParaRPr/>
+            <a:r>
+              <a:rPr lang="fr-FR" dirty="0"/>
+              <a:t>C’est la </a:t>
+            </a:r>
+            <a:r>
+              <a:rPr lang="fr-FR" b="1" dirty="0"/>
+              <a:t>MAE sur le test familial</a:t>
+            </a:r>
+            <a:r>
+              <a:rPr lang="fr-FR" dirty="0"/>
+              <a:t> : les prédictions s’écartent en moyenne de 16,8 g/km des valeurs observées.</a:t>
+            </a:r>
           </a:p>
           <a:p>
-            <a:r>
-              <a:t>Sources : travail_v2/resultats/supervise_test.csv, clustering_resume.json, clustering_stabilite.csv.</a:t>
-            </a:r>
+            <a:endParaRPr lang="fr-FR" dirty="0"/>
           </a:p>
           <a:p>
-            <a:endParaRPr/>
+            <a:r>
+              <a:rPr lang="fr-FR" dirty="0"/>
+              <a:t>Le modèle fait mieux que la référence simple, dont l’erreur atteint environ </a:t>
+            </a:r>
+            <a:r>
+              <a:rPr lang="fr-FR" b="1" dirty="0"/>
+              <a:t>41,7 g/km</a:t>
+            </a:r>
+            <a:r>
+              <a:rPr lang="fr-FR" dirty="0"/>
+              <a:t>. Il apprend donc une relation utile, mais cette moyenne ne garantit pas une bonne prédiction pour chaque véhicule.</a:t>
+            </a:r>
           </a:p>
           <a:p>
-            <a:r>
-              <a:t>Définitions à rappeler à l’oral :</a:t>
-            </a:r>
+            <a:endParaRPr lang="fr-FR" dirty="0"/>
           </a:p>
           <a:p>
-            <a:endParaRPr/>
+            <a:r>
+              <a:rPr lang="fr-FR" b="1" dirty="0"/>
+              <a:t>2. « 3 profils » : la segmentation aide à décrire le catalogue</a:t>
+            </a:r>
+            <a:endParaRPr lang="fr-FR" dirty="0"/>
           </a:p>
           <a:p>
             <a:r>
+              <a:rPr lang="fr-FR" dirty="0"/>
+              <a:t>K-</a:t>
+            </a:r>
+            <a:r>
+              <a:rPr lang="fr-FR" dirty="0" err="1"/>
+              <a:t>means</a:t>
+            </a:r>
+            <a:r>
+              <a:rPr lang="fr-FR" dirty="0"/>
+              <a:t> distingue trois profils moyens :</a:t>
+            </a:r>
+          </a:p>
+          <a:p>
+            <a:pPr lvl="0"/>
+            <a:r>
+              <a:rPr lang="fr-FR" b="1" dirty="0"/>
+              <a:t>C0</a:t>
+            </a:r>
+            <a:r>
+              <a:rPr lang="fr-FR" dirty="0"/>
+              <a:t> : véhicules moins puissants, plus légers et moins émetteurs en moyenne.</a:t>
+            </a:r>
+          </a:p>
+          <a:p>
+            <a:pPr lvl="0"/>
+            <a:r>
+              <a:rPr lang="fr-FR" b="1" dirty="0"/>
+              <a:t>C1</a:t>
+            </a:r>
+            <a:r>
+              <a:rPr lang="fr-FR" dirty="0"/>
+              <a:t> : véhicules plus lourds.</a:t>
+            </a:r>
+          </a:p>
+          <a:p>
+            <a:pPr lvl="0"/>
+            <a:r>
+              <a:rPr lang="fr-FR" b="1" dirty="0"/>
+              <a:t>C2</a:t>
+            </a:r>
+            <a:r>
+              <a:rPr lang="fr-FR" dirty="0"/>
+              <a:t> : véhicules plus puissants et plus émetteurs.</a:t>
+            </a:r>
+          </a:p>
+          <a:p>
+            <a:endParaRPr lang="fr-FR" dirty="0"/>
+          </a:p>
+          <a:p>
+            <a:r>
+              <a:rPr lang="fr-FR" b="1" dirty="0"/>
+              <a:t>3. « ARI 0,548 » : les groupes dépendent de la composition du catalogue</a:t>
+            </a:r>
+            <a:endParaRPr lang="fr-FR" dirty="0"/>
+          </a:p>
+          <a:p>
+            <a:r>
+              <a:rPr lang="fr-FR" dirty="0"/>
+              <a:t>On a refait la segmentation en gardant </a:t>
+            </a:r>
+            <a:r>
+              <a:rPr lang="fr-FR" b="1" dirty="0"/>
+              <a:t>au maximum 50 variantes par famille</a:t>
+            </a:r>
+            <a:r>
+              <a:rPr lang="fr-FR" dirty="0"/>
+              <a:t>, pour réduire l’influence des familles très nombreuses.</a:t>
+            </a:r>
+          </a:p>
+          <a:p>
+            <a:endParaRPr lang="fr-FR" dirty="0"/>
+          </a:p>
+          <a:p>
+            <a:r>
+              <a:rPr lang="fr-FR" dirty="0"/>
+              <a:t>L’</a:t>
+            </a:r>
+            <a:r>
+              <a:rPr lang="fr-FR" b="1" dirty="0"/>
+              <a:t>ARI compare les deux regroupements</a:t>
+            </a:r>
+            <a:r>
+              <a:rPr lang="fr-FR" dirty="0"/>
+              <a:t> :</a:t>
+            </a:r>
+          </a:p>
+          <a:p>
+            <a:pPr lvl="0"/>
+            <a:r>
+              <a:rPr lang="fr-FR" b="1" dirty="0"/>
+              <a:t>1</a:t>
+            </a:r>
+            <a:r>
+              <a:rPr lang="fr-FR" dirty="0"/>
+              <a:t> : mêmes regroupements, même si les numéros des groupes changent.</a:t>
+            </a:r>
+          </a:p>
+          <a:p>
+            <a:pPr lvl="0"/>
+            <a:r>
+              <a:rPr lang="fr-FR" b="1" dirty="0"/>
+              <a:t>0</a:t>
+            </a:r>
+            <a:r>
+              <a:rPr lang="fr-FR" dirty="0"/>
+              <a:t> : accord comparable au hasard.</a:t>
+            </a:r>
+          </a:p>
+          <a:p>
+            <a:pPr lvl="0"/>
+            <a:r>
+              <a:rPr lang="fr-FR" b="1" dirty="0"/>
+              <a:t>0,548</a:t>
+            </a:r>
+            <a:r>
+              <a:rPr lang="fr-FR" dirty="0"/>
+              <a:t> : accord partiel ; les regroupements ont sensiblement changé.</a:t>
+            </a:r>
+          </a:p>
+          <a:p>
+            <a:r>
+              <a:rPr lang="fr-FR" b="1" dirty="0"/>
+              <a:t>Ce n’est pas un taux de réussite de 54,8 %.</a:t>
+            </a:r>
+            <a:endParaRPr lang="fr-FR" dirty="0"/>
+          </a:p>
+          <a:p>
+            <a:r>
+              <a:rPr lang="fr-FR" dirty="0"/>
+              <a:t>Le message est important : obtenir presque les mêmes groupes avec plusieurs initialisations ne suffit pas. Les groupes peuvent rester sensibles aux véhicules représentés dans les données.</a:t>
+            </a:r>
+          </a:p>
+          <a:p>
+            <a:endParaRPr lang="fr-FR" dirty="0"/>
+          </a:p>
+          <a:p>
+            <a:r>
+              <a:rPr lang="fr-FR" b="1" dirty="0"/>
+              <a:t>4. « Un support pour enquêter » : une utilité exploratoire</a:t>
+            </a:r>
+            <a:endParaRPr lang="fr-FR" dirty="0"/>
+          </a:p>
+          <a:p>
+            <a:r>
+              <a:rPr lang="fr-FR" dirty="0"/>
+              <a:t>L’étude aide à comparer des profils et à choisir les informations à approfondir. Pour décider d’un remplacement de véhicule, il faudrait aussi connaître le kilométrage, l’usage, les contraintes et les impacts du cycle de vie.</a:t>
+            </a:r>
+          </a:p>
+          <a:p>
+            <a:endParaRPr lang="fr-FR" dirty="0"/>
+          </a:p>
+          <a:p>
+            <a:r>
+              <a:rPr lang="fr-FR" dirty="0"/>
+              <a:t>Notre étude apporte deux résultats : une estimation du CO₂ avec une erreur moyenne de 16,8 g/km, et trois profils techniques interprétables. Cependant, la segmentation change lorsqu’on réduit le poids des familles très représentées : l’ARI descend à 0,548. La composition du catalogue influence donc nos résultats. Cette étude constitue un support pour comparer des profils et orienter les recherches. Avant une décision environnementale, il faudra compléter les données d’usage et réaliser une validation indépendante.</a:t>
+            </a:r>
+          </a:p>
+          <a:p>
+            <a:endParaRPr lang="fr-FR" dirty="0"/>
+          </a:p>
+          <a:p>
+            <a:endParaRPr dirty="0"/>
+          </a:p>
+          <a:p>
+            <a:r>
+              <a:rPr dirty="0"/>
+              <a:t>Sources : travail_v2/</a:t>
+            </a:r>
+            <a:r>
+              <a:rPr dirty="0" err="1"/>
+              <a:t>resultats</a:t>
+            </a:r>
+            <a:r>
+              <a:rPr dirty="0"/>
+              <a:t>/</a:t>
+            </a:r>
+            <a:r>
+              <a:rPr dirty="0" err="1"/>
+              <a:t>supervise_test.csv</a:t>
+            </a:r>
+            <a:r>
+              <a:rPr dirty="0"/>
+              <a:t>, </a:t>
+            </a:r>
+            <a:r>
+              <a:rPr dirty="0" err="1"/>
+              <a:t>clustering_resume.json</a:t>
+            </a:r>
+            <a:r>
+              <a:rPr dirty="0"/>
+              <a:t>, </a:t>
+            </a:r>
+            <a:r>
+              <a:rPr dirty="0" err="1"/>
+              <a:t>clustering_stabilite.csv</a:t>
+            </a:r>
+            <a:r>
+              <a:rPr dirty="0"/>
+              <a:t>.</a:t>
+            </a:r>
+          </a:p>
+          <a:p>
+            <a:endParaRPr dirty="0"/>
+          </a:p>
+          <a:p>
+            <a:r>
+              <a:rPr dirty="0" err="1"/>
+              <a:t>Définitio</a:t>
+            </a:r>
+            <a:r>
+              <a:rPr lang="cy-GB" dirty="0"/>
+              <a:t>ns à rappeler à l’oral :</a:t>
+            </a:r>
+          </a:p>
+          <a:p>
+            <a:endParaRPr lang="cy-GB" dirty="0"/>
+          </a:p>
+          <a:p>
+            <a:r>
+              <a:rPr lang="cy-GB" dirty="0"/>
               <a:t>MAE — Mean Absolute Error, ou erreur absolue moyenne. On calcule la moyenne des écarts absolus entre les CO₂ observés et prédits : MAE = moyenne(|y − ŷ|). Elle s’exprime en g/km ; plus elle est faible, mieux c’est. Ici, une MAE de 16,78 g/km signifie que les prédictions s’écartent en moyenne de 16,78 g/km des mesures du test, sans tenir compte du sens de l’erreur. Ce n’est ni une erreur maximale ni une garantie pour chaque véhicule.</a:t>
             </a:r>
           </a:p>
@@ -22576,23 +23473,250 @@
           <a:lstStyle/>
           <a:p>
             <a:r>
-              <a:t>Durée : 75 secondes.</a:t>
+              <a:rPr dirty="0"/>
+              <a:t>Durée : 75 </a:t>
+            </a:r>
+            <a:r>
+              <a:rPr dirty="0" err="1"/>
+              <a:t>secondes</a:t>
+            </a:r>
+            <a:r>
+              <a:rPr dirty="0"/>
+              <a:t>.</a:t>
             </a:r>
           </a:p>
           <a:p>
-            <a:endParaRPr/>
+            <a:endParaRPr dirty="0"/>
           </a:p>
           <a:p>
             <a:r>
-              <a:t>La médiane de CO2 est 147 g/km, avec un intervalle interquartile de 122 à 180 g/km. Le graphique montre une distribution asymétrique. Les dix familles les plus fréquentes concentrent 63,1 % des lignes. Cette concentration peut orienter une moyenne, un modèle ou un clustering vers des variantes nombreuses. Nous séparons les familles pour évaluer la prédiction et plafonnons leur contribution dans une analyse de sensibilité. On observe des relations, pas des causes.</a:t>
+              <a:rPr dirty="0"/>
+              <a:t>La </a:t>
+            </a:r>
+            <a:r>
+              <a:rPr dirty="0" err="1"/>
+              <a:t>médiane</a:t>
+            </a:r>
+            <a:r>
+              <a:rPr dirty="0"/>
+              <a:t> de CO2 est 147 g/km, avec un </a:t>
+            </a:r>
+            <a:r>
+              <a:rPr dirty="0" err="1"/>
+              <a:t>intervalle</a:t>
+            </a:r>
+            <a:r>
+              <a:rPr dirty="0"/>
+              <a:t> interquartile de 122 à 180 g/km. Le </a:t>
+            </a:r>
+            <a:r>
+              <a:rPr dirty="0" err="1"/>
+              <a:t>graphique</a:t>
+            </a:r>
+            <a:r>
+              <a:rPr dirty="0"/>
+              <a:t> montre </a:t>
+            </a:r>
+            <a:r>
+              <a:rPr dirty="0" err="1"/>
+              <a:t>une</a:t>
+            </a:r>
+            <a:r>
+              <a:rPr dirty="0"/>
+              <a:t> distribution </a:t>
+            </a:r>
+            <a:r>
+              <a:rPr dirty="0" err="1"/>
+              <a:t>asymétrique</a:t>
+            </a:r>
+            <a:r>
+              <a:rPr dirty="0"/>
+              <a:t>. Les dix </a:t>
+            </a:r>
+            <a:r>
+              <a:rPr dirty="0" err="1"/>
+              <a:t>familles</a:t>
+            </a:r>
+            <a:r>
+              <a:rPr dirty="0"/>
+              <a:t> les plus </a:t>
+            </a:r>
+            <a:r>
+              <a:rPr dirty="0" err="1"/>
+              <a:t>fréquentes</a:t>
+            </a:r>
+            <a:r>
+              <a:rPr dirty="0"/>
+              <a:t> </a:t>
+            </a:r>
+            <a:r>
+              <a:rPr dirty="0" err="1"/>
+              <a:t>concentrent</a:t>
+            </a:r>
+            <a:r>
+              <a:rPr dirty="0"/>
+              <a:t> 63,1 % des </a:t>
+            </a:r>
+            <a:r>
+              <a:rPr dirty="0" err="1"/>
+              <a:t>lignes</a:t>
+            </a:r>
+            <a:r>
+              <a:rPr dirty="0"/>
+              <a:t>. Cette concentration </a:t>
+            </a:r>
+            <a:r>
+              <a:rPr dirty="0" err="1"/>
+              <a:t>peut</a:t>
+            </a:r>
+            <a:r>
+              <a:rPr dirty="0"/>
+              <a:t> </a:t>
+            </a:r>
+            <a:r>
+              <a:rPr dirty="0" err="1"/>
+              <a:t>orienter</a:t>
+            </a:r>
+            <a:r>
+              <a:rPr dirty="0"/>
+              <a:t> </a:t>
+            </a:r>
+            <a:r>
+              <a:rPr dirty="0" err="1"/>
+              <a:t>une</a:t>
+            </a:r>
+            <a:r>
+              <a:rPr dirty="0"/>
+              <a:t> </a:t>
+            </a:r>
+            <a:r>
+              <a:rPr dirty="0" err="1"/>
+              <a:t>moyenne</a:t>
+            </a:r>
+            <a:r>
+              <a:rPr dirty="0"/>
+              <a:t>, un </a:t>
+            </a:r>
+            <a:r>
+              <a:rPr dirty="0" err="1"/>
+              <a:t>modèle</a:t>
+            </a:r>
+            <a:r>
+              <a:rPr dirty="0"/>
+              <a:t> </a:t>
+            </a:r>
+            <a:r>
+              <a:rPr dirty="0" err="1"/>
+              <a:t>ou</a:t>
+            </a:r>
+            <a:r>
+              <a:rPr dirty="0"/>
+              <a:t> un clustering vers des </a:t>
+            </a:r>
+            <a:r>
+              <a:rPr dirty="0" err="1"/>
+              <a:t>variantes</a:t>
+            </a:r>
+            <a:r>
+              <a:rPr dirty="0"/>
+              <a:t> </a:t>
+            </a:r>
+            <a:r>
+              <a:rPr dirty="0" err="1"/>
+              <a:t>nombreuses</a:t>
+            </a:r>
+            <a:r>
+              <a:rPr dirty="0"/>
+              <a:t>. Nous </a:t>
+            </a:r>
+            <a:r>
+              <a:rPr dirty="0" err="1"/>
+              <a:t>séparons</a:t>
+            </a:r>
+            <a:r>
+              <a:rPr dirty="0"/>
+              <a:t> les </a:t>
+            </a:r>
+            <a:r>
+              <a:rPr dirty="0" err="1"/>
+              <a:t>familles</a:t>
+            </a:r>
+            <a:r>
+              <a:rPr dirty="0"/>
+              <a:t> pour </a:t>
+            </a:r>
+            <a:r>
+              <a:rPr dirty="0" err="1"/>
+              <a:t>évaluer</a:t>
+            </a:r>
+            <a:r>
+              <a:rPr dirty="0"/>
+              <a:t> la </a:t>
+            </a:r>
+            <a:r>
+              <a:rPr dirty="0" err="1"/>
+              <a:t>prédiction</a:t>
+            </a:r>
+            <a:r>
+              <a:rPr dirty="0"/>
+              <a:t> et </a:t>
+            </a:r>
+            <a:r>
+              <a:rPr dirty="0" err="1"/>
+              <a:t>plafonnons</a:t>
+            </a:r>
+            <a:r>
+              <a:rPr dirty="0"/>
+              <a:t> </a:t>
+            </a:r>
+            <a:r>
+              <a:rPr dirty="0" err="1"/>
+              <a:t>leur</a:t>
+            </a:r>
+            <a:r>
+              <a:rPr dirty="0"/>
+              <a:t> contribution dans </a:t>
+            </a:r>
+            <a:r>
+              <a:rPr dirty="0" err="1"/>
+              <a:t>une</a:t>
+            </a:r>
+            <a:r>
+              <a:rPr dirty="0"/>
+              <a:t> </a:t>
+            </a:r>
+            <a:r>
+              <a:rPr dirty="0" err="1"/>
+              <a:t>analyse</a:t>
+            </a:r>
+            <a:r>
+              <a:rPr dirty="0"/>
+              <a:t> de </a:t>
+            </a:r>
+            <a:r>
+              <a:rPr dirty="0" err="1"/>
+              <a:t>sensibilité</a:t>
+            </a:r>
+            <a:r>
+              <a:rPr dirty="0"/>
+              <a:t>. On observe des relations, pas des causes.</a:t>
             </a:r>
           </a:p>
           <a:p>
-            <a:endParaRPr/>
+            <a:endParaRPr dirty="0"/>
           </a:p>
           <a:p>
             <a:r>
-              <a:t>Source : donnees_nettoyees/vehicules_analyse_conso_co2.csv.</a:t>
+              <a:rPr dirty="0"/>
+              <a:t>Source : </a:t>
+            </a:r>
+            <a:r>
+              <a:rPr dirty="0" err="1"/>
+              <a:t>donnees_nettoyees</a:t>
+            </a:r>
+            <a:r>
+              <a:rPr dirty="0"/>
+              <a:t>/vehicules_analyse_conso_co2.csv.</a:t>
             </a:r>
           </a:p>
         </p:txBody>
@@ -23214,23 +24338,76 @@
           <a:lstStyle/>
           <a:p>
             <a:r>
-              <a:t>Durée : 80 secondes.</a:t>
-            </a:r>
+              <a:rPr dirty="0"/>
+              <a:t>Durée : 80 </a:t>
+            </a:r>
+            <a:r>
+              <a:rPr dirty="0" err="1"/>
+              <a:t>secondes</a:t>
+            </a:r>
+            <a:r>
+              <a:rPr dirty="0"/>
+              <a:t>.</a:t>
+            </a:r>
+            <a:endParaRPr lang="fr-FR" dirty="0"/>
           </a:p>
           <a:p>
-            <a:endParaRPr/>
+            <a:endParaRPr lang="fr-FR" dirty="0"/>
           </a:p>
           <a:p>
             <a:r>
-              <a:t>La segmentation regroupe les variantes par proximité dans un espace de caractéristiques. Ici, aucune variable y n'est à prédire. Le CO2 fait partie des variables descriptives, avec la puissance et la masse. Les couleurs montrent déjà la solution finale K=3, que nous allons justifier. Les étiquettes C0, C1, C2 servent à identifier les profils et n'ont pas d'ordre universel. Nous les avons ordonnées par CO2 moyen croissant pour garder la lecture cohérente. Le graphique affiche 220 points tirés dans chacun des clusters pour éviter de masquer le plus petit. Ce sous-échantillon visuel ne respecte donc pas les proportions du catalogue, indiquées séparément. Le calcul du clustering porte sur les 20 824 lignes.</a:t>
+              <a:rPr lang="fr-FR" dirty="0"/>
+              <a:t>Introduction à la segmentation des données, on cherche à regrouper les </a:t>
+            </a:r>
+            <a:r>
+              <a:rPr lang="fr-FR" dirty="0" err="1"/>
+              <a:t>véhciules</a:t>
+            </a:r>
+            <a:r>
+              <a:rPr lang="fr-FR" dirty="0"/>
+              <a:t> qui se ressemble.</a:t>
             </a:r>
           </a:p>
           <a:p>
-            <a:endParaRPr/>
+            <a:endParaRPr dirty="0"/>
           </a:p>
           <a:p>
             <a:r>
-              <a:t>Source : travail_v2/resultats/clustering_points.csv.</a:t>
+              <a:rPr lang="fr-FR" dirty="0"/>
+              <a:t>Nous passons maintenant à la segmentation. L’objectif est de regrouper les véhicules selon leur puissance, leur masse et leurs émissions. Chaque couleur représente un groupe obtenu avec K-</a:t>
+            </a:r>
+            <a:r>
+              <a:rPr lang="fr-FR" dirty="0" err="1"/>
+              <a:t>means</a:t>
+            </a:r>
+            <a:r>
+              <a:rPr lang="fr-FR" dirty="0"/>
+              <a:t>. Ce graphique donne un aperçu des profils ; nous allons maintenant expliquer le choix des variables et la préparation nécessaire pour comparer correctement les véhicules.</a:t>
+            </a:r>
+          </a:p>
+          <a:p>
+            <a:endParaRPr dirty="0"/>
+          </a:p>
+          <a:p>
+            <a:r>
+              <a:rPr dirty="0"/>
+              <a:t>Source : travail_v2/</a:t>
+            </a:r>
+            <a:r>
+              <a:rPr dirty="0" err="1"/>
+              <a:t>resultats</a:t>
+            </a:r>
+            <a:r>
+              <a:rPr dirty="0"/>
+              <a:t>/</a:t>
+            </a:r>
+            <a:r>
+              <a:rPr dirty="0" err="1"/>
+              <a:t>clustering_points.csv</a:t>
+            </a:r>
+            <a:r>
+              <a:rPr dirty="0"/>
+              <a:t>.</a:t>
             </a:r>
           </a:p>
         </p:txBody>
@@ -26679,10 +27856,10 @@
       </p:sp>
       <p:sp>
         <p:nvSpPr>
-          <p:cNvPr id="7" name="presenter-badge">
+          <p:cNvPr id="8" name="presenter-badge">
             <a:extLst>
               <a:ext uri="{FF2B5EF4-FFF2-40B4-BE49-F238E27FC236}">
-                <a16:creationId xmlns:a16="http://schemas.microsoft.com/office/drawing/2014/main" id="{8E114093-52BE-45A5-AA47-4B3EFA71A129}"/>
+                <a16:creationId xmlns:a16="http://schemas.microsoft.com/office/drawing/2014/main" id="{CFA40BB7-DD8E-1454-F6FC-9BD7CEA0CDFA}"/>
               </a:ext>
             </a:extLst>
           </p:cNvPr>
@@ -26702,7 +27879,7 @@
             </a:avLst>
           </a:prstGeom>
           <a:solidFill>
-            <a:srgbClr val="00756F"/>
+            <a:srgbClr val="315F94"/>
           </a:solidFill>
           <a:ln w="0">
             <a:noFill/>
@@ -26791,12 +27968,12 @@
               </a:defRPr>
             </a:pPr>
             <a:r>
-              <a:rPr sz="1500" b="1">
+              <a:rPr sz="1500" b="1" dirty="0">
                 <a:solidFill>
                   <a:srgbClr val="FFFFFF"/>
                 </a:solidFill>
               </a:rPr>
-              <a:t>Clément</a:t>
+              <a:t>Paul</a:t>
             </a:r>
           </a:p>
         </p:txBody>
@@ -37927,12 +39104,28 @@
                     <a:lstStyle/>
                     <a:p>
                       <a:r>
-                        <a:rPr sz="1875" b="0">
+                        <a:rPr sz="1875" b="0" dirty="0">
                           <a:solidFill>
                             <a:srgbClr val="17363A"/>
                           </a:solidFill>
                         </a:rPr>
-                        <a:t>56 lignes EL sans CO₂</a:t>
+                        <a:t>56 </a:t>
+                      </a:r>
+                      <a:r>
+                        <a:rPr sz="1875" b="0" dirty="0" err="1">
+                          <a:solidFill>
+                            <a:srgbClr val="17363A"/>
+                          </a:solidFill>
+                        </a:rPr>
+                        <a:t>lignes</a:t>
+                      </a:r>
+                      <a:r>
+                        <a:rPr sz="1875" b="0" dirty="0">
+                          <a:solidFill>
+                            <a:srgbClr val="17363A"/>
+                          </a:solidFill>
+                        </a:rPr>
+                        <a:t> EL sans CO₂</a:t>
                       </a:r>
                     </a:p>
                   </a:txBody>
@@ -38102,10 +39295,10 @@
       </p:sp>
       <p:sp>
         <p:nvSpPr>
-          <p:cNvPr id="11" name="presenter-badge">
+          <p:cNvPr id="16" name="presenter-badge">
             <a:extLst>
               <a:ext uri="{FF2B5EF4-FFF2-40B4-BE49-F238E27FC236}">
-                <a16:creationId xmlns:a16="http://schemas.microsoft.com/office/drawing/2014/main" id="{325D764C-ED85-4DB8-8603-755E50ECA5B8}"/>
+                <a16:creationId xmlns:a16="http://schemas.microsoft.com/office/drawing/2014/main" id="{84F1FE4C-CB9A-FAF1-37DA-9C3B9DFF28FA}"/>
               </a:ext>
             </a:extLst>
           </p:cNvPr>
@@ -38125,7 +39318,7 @@
             </a:avLst>
           </a:prstGeom>
           <a:solidFill>
-            <a:srgbClr val="00756F"/>
+            <a:srgbClr val="315F94"/>
           </a:solidFill>
           <a:ln w="0">
             <a:noFill/>
@@ -38214,12 +39407,12 @@
               </a:defRPr>
             </a:pPr>
             <a:r>
-              <a:rPr sz="1500" b="1">
+              <a:rPr sz="1500" b="1" dirty="0">
                 <a:solidFill>
                   <a:srgbClr val="FFFFFF"/>
                 </a:solidFill>
               </a:rPr>
-              <a:t>Clément</a:t>
+              <a:t>Paul</a:t>
             </a:r>
           </a:p>
         </p:txBody>
@@ -46105,7 +47298,7 @@
               </a:defRPr>
             </a:pPr>
             <a:r>
-              <a:rPr sz="1500" b="1">
+              <a:rPr sz="1500" b="1" dirty="0">
                 <a:solidFill>
                   <a:srgbClr val="FFFFFF"/>
                 </a:solidFill>
@@ -46889,7 +48082,7 @@
               </a:defRPr>
             </a:pPr>
             <a:r>
-              <a:rPr sz="1500" b="1">
+              <a:rPr sz="1500" b="1" dirty="0">
                 <a:solidFill>
                   <a:srgbClr val="FFFFFF"/>
                 </a:solidFill>
@@ -48041,10 +49234,10 @@
       </p:sp>
       <p:sp>
         <p:nvSpPr>
-          <p:cNvPr id="13" name="presenter-badge">
+          <p:cNvPr id="12" name="presenter-badge">
             <a:extLst>
               <a:ext uri="{FF2B5EF4-FFF2-40B4-BE49-F238E27FC236}">
-                <a16:creationId xmlns:a16="http://schemas.microsoft.com/office/drawing/2014/main" id="{0F4FE194-BF6D-BB95-1F73-BA5FBFF3442F}"/>
+                <a16:creationId xmlns:a16="http://schemas.microsoft.com/office/drawing/2014/main" id="{2A5A0D91-6883-61CF-2BF7-740DF36E7C9D}"/>
               </a:ext>
             </a:extLst>
           </p:cNvPr>
@@ -48064,7 +49257,7 @@
             </a:avLst>
           </a:prstGeom>
           <a:solidFill>
-            <a:srgbClr val="315F94"/>
+            <a:srgbClr val="00756F"/>
           </a:solidFill>
           <a:ln w="0">
             <a:noFill/>
@@ -48153,12 +49346,12 @@
               </a:defRPr>
             </a:pPr>
             <a:r>
-              <a:rPr sz="1500" b="1">
+              <a:rPr sz="1500" b="1" dirty="0">
                 <a:solidFill>
                   <a:srgbClr val="FFFFFF"/>
                 </a:solidFill>
               </a:rPr>
-              <a:t>Paul</a:t>
+              <a:t>Clément</a:t>
             </a:r>
           </a:p>
         </p:txBody>
@@ -48962,10 +50155,10 @@
       </p:sp>
       <p:sp>
         <p:nvSpPr>
-          <p:cNvPr id="10" name="presenter-badge">
+          <p:cNvPr id="11" name="presenter-badge">
             <a:extLst>
               <a:ext uri="{FF2B5EF4-FFF2-40B4-BE49-F238E27FC236}">
-                <a16:creationId xmlns:a16="http://schemas.microsoft.com/office/drawing/2014/main" id="{F0E826B5-9C52-26E8-5489-5D4B22117D7A}"/>
+                <a16:creationId xmlns:a16="http://schemas.microsoft.com/office/drawing/2014/main" id="{177055D7-6346-9D0A-083C-A5D12883E060}"/>
               </a:ext>
             </a:extLst>
           </p:cNvPr>
@@ -48985,7 +50178,7 @@
             </a:avLst>
           </a:prstGeom>
           <a:solidFill>
-            <a:srgbClr val="315F94"/>
+            <a:srgbClr val="00756F"/>
           </a:solidFill>
           <a:ln w="0">
             <a:noFill/>
@@ -49074,12 +50267,12 @@
               </a:defRPr>
             </a:pPr>
             <a:r>
-              <a:rPr sz="1500" b="1">
+              <a:rPr sz="1500" b="1" dirty="0">
                 <a:solidFill>
                   <a:srgbClr val="FFFFFF"/>
                 </a:solidFill>
               </a:rPr>
-              <a:t>Paul</a:t>
+              <a:t>Clément</a:t>
             </a:r>
           </a:p>
         </p:txBody>
